--- a/dist/초6/영어/말하기와쓰기/초6_영어_말하기와쓰기_03_의견말하기_학생용.pptx
+++ b/dist/초6/영어/말하기와쓰기/초6_영어_말하기와쓰기_03_의견말하기_학생용.pptx
@@ -119,20 +119,20 @@
   <p:extLst>
     <p:ext uri="{521415D9-36F7-43E2-AB2F-B90AF26B5E84}">
       <p14:sectionLst xmlns:p14="http://schemas.microsoft.com/office/powerpoint/2010/main">
-        <p14:section name="도입" id="{ba558c3a-f5d7-548c-dbc5-8148d9ab0728}">
+        <p14:section name="도입" id="{d2a8891e-2002-7aa3-6cbc-48bce3cb2ca5}">
           <p14:sldIdLst>
             <p14:sldId id="256"/>
             <p14:sldId id="257"/>
           </p14:sldIdLst>
         </p14:section>
-        <p14:section name="개념" id="{1dc30c87-f8b3-2ab0-526c-124af7c9cb6e}">
+        <p14:section name="개념" id="{918466d7-c2f0-a014-e728-bdc9d2136dc1}">
           <p14:sldIdLst>
             <p14:sldId id="258"/>
             <p14:sldId id="259"/>
             <p14:sldId id="260"/>
           </p14:sldIdLst>
         </p14:section>
-        <p14:section name="연습" id="{58bf1d5a-8a11-cad9-c1ac-06562416a639}">
+        <p14:section name="연습" id="{d20b9497-d5e8-aed3-097f-5df7898a58eb}">
           <p14:sldIdLst>
             <p14:sldId id="261"/>
             <p14:sldId id="262"/>
@@ -140,18 +140,18 @@
             <p14:sldId id="264"/>
           </p14:sldIdLst>
         </p14:section>
-        <p14:section name="확인" id="{9db44ec3-269a-2450-1011-0e8e8b716886}">
+        <p14:section name="확인" id="{bbeb16f4-edd4-4ddb-b02c-7cc068e7bb8c}">
           <p14:sldIdLst>
             <p14:sldId id="265"/>
             <p14:sldId id="266"/>
           </p14:sldIdLst>
         </p14:section>
-        <p14:section name="정리" id="{899e2768-36bd-70ee-95b5-68c68798fb0e}">
+        <p14:section name="정리" id="{1bd593af-6a5a-9f16-0048-88b339bb4f3a}">
           <p14:sldIdLst>
             <p14:sldId id="267"/>
           </p14:sldIdLst>
         </p14:section>
-        <p14:section name="보충" id="{a74c9237-304e-fa13-017b-c2be592c774a}">
+        <p14:section name="보충" id="{0851d338-0723-d6a3-81b7-cb8253b66872}">
           <p14:sldIdLst>
             <p14:sldId id="268"/>
           </p14:sldIdLst>
@@ -3042,7 +3042,7 @@
       </p:sp>
       <p:sp>
         <p:nvSpPr>
-          <p:cNvPr id="3" name="S10-text64"/>
+          <p:cNvPr id="3" name="S10-text67"/>
           <p:cNvSpPr txBox="1"/>
           <p:nvPr/>
         </p:nvSpPr>
@@ -3081,7 +3081,7 @@
       </p:sp>
       <p:sp>
         <p:nvSpPr>
-          <p:cNvPr id="4" name="S10-chip65"/>
+          <p:cNvPr id="4" name="S10-chip68"/>
           <p:cNvSpPr txBox="1"/>
           <p:nvPr/>
         </p:nvSpPr>
@@ -3128,7 +3128,7 @@
       </p:sp>
       <p:sp>
         <p:nvSpPr>
-          <p:cNvPr id="5" name="S10-text66"/>
+          <p:cNvPr id="5" name="S10-text69"/>
           <p:cNvSpPr txBox="1"/>
           <p:nvPr/>
         </p:nvSpPr>
@@ -3184,7 +3184,7 @@
       </p:sp>
       <p:sp>
         <p:nvSpPr>
-          <p:cNvPr id="6" name="S10-chip67"/>
+          <p:cNvPr id="6" name="S10-chip70"/>
           <p:cNvSpPr txBox="1"/>
           <p:nvPr/>
         </p:nvSpPr>
@@ -3231,7 +3231,7 @@
       </p:sp>
       <p:sp>
         <p:nvSpPr>
-          <p:cNvPr id="7" name="S10-text68"/>
+          <p:cNvPr id="7" name="S10-text71"/>
           <p:cNvSpPr txBox="1"/>
           <p:nvPr/>
         </p:nvSpPr>
@@ -3287,7 +3287,7 @@
       </p:sp>
       <p:sp>
         <p:nvSpPr>
-          <p:cNvPr id="8" name="S10-chip69"/>
+          <p:cNvPr id="8" name="S10-chip72"/>
           <p:cNvSpPr txBox="1"/>
           <p:nvPr/>
         </p:nvSpPr>
@@ -3334,7 +3334,7 @@
       </p:sp>
       <p:sp>
         <p:nvSpPr>
-          <p:cNvPr id="9" name="S10-text70"/>
+          <p:cNvPr id="9" name="S10-text73"/>
           <p:cNvSpPr txBox="1"/>
           <p:nvPr/>
         </p:nvSpPr>
@@ -3390,7 +3390,7 @@
       </p:sp>
       <p:sp>
         <p:nvSpPr>
-          <p:cNvPr id="10" name="S10-chip71"/>
+          <p:cNvPr id="10" name="S10-chip74"/>
           <p:cNvSpPr txBox="1"/>
           <p:nvPr/>
         </p:nvSpPr>
@@ -3437,7 +3437,7 @@
       </p:sp>
       <p:sp>
         <p:nvSpPr>
-          <p:cNvPr id="11" name="S10-text72"/>
+          <p:cNvPr id="11" name="S10-text75"/>
           <p:cNvSpPr txBox="1"/>
           <p:nvPr/>
         </p:nvSpPr>
@@ -3590,7 +3590,7 @@
       </p:sp>
       <p:sp>
         <p:nvSpPr>
-          <p:cNvPr id="3" name="S12-card73"/>
+          <p:cNvPr id="3" name="S12-card76"/>
           <p:cNvSpPr/>
           <p:nvPr/>
         </p:nvSpPr>
@@ -3617,7 +3617,7 @@
       </p:sp>
       <p:sp>
         <p:nvSpPr>
-          <p:cNvPr id="4" name="S12-cardtext74"/>
+          <p:cNvPr id="4" name="S12-cardtext77"/>
           <p:cNvSpPr txBox="1"/>
           <p:nvPr/>
         </p:nvSpPr>
@@ -3659,7 +3659,7 @@
       </p:sp>
       <p:sp>
         <p:nvSpPr>
-          <p:cNvPr id="5" name="S12-chip75"/>
+          <p:cNvPr id="5" name="S12-chip78"/>
           <p:cNvSpPr txBox="1"/>
           <p:nvPr/>
         </p:nvSpPr>
@@ -3706,7 +3706,7 @@
       </p:sp>
       <p:sp>
         <p:nvSpPr>
-          <p:cNvPr id="6" name="S12-card76"/>
+          <p:cNvPr id="6" name="S12-card79"/>
           <p:cNvSpPr/>
           <p:nvPr/>
         </p:nvSpPr>
@@ -3733,7 +3733,7 @@
       </p:sp>
       <p:sp>
         <p:nvSpPr>
-          <p:cNvPr id="7" name="S12-cardtext77"/>
+          <p:cNvPr id="7" name="S12-cardtext80"/>
           <p:cNvSpPr txBox="1"/>
           <p:nvPr/>
         </p:nvSpPr>
@@ -3775,7 +3775,7 @@
       </p:sp>
       <p:sp>
         <p:nvSpPr>
-          <p:cNvPr id="8" name="S12-chip78"/>
+          <p:cNvPr id="8" name="S12-chip81"/>
           <p:cNvSpPr txBox="1"/>
           <p:nvPr/>
         </p:nvSpPr>
@@ -3822,7 +3822,7 @@
       </p:sp>
       <p:sp>
         <p:nvSpPr>
-          <p:cNvPr id="9" name="S12-card79"/>
+          <p:cNvPr id="9" name="S12-card82"/>
           <p:cNvSpPr/>
           <p:nvPr/>
         </p:nvSpPr>
@@ -3849,7 +3849,7 @@
       </p:sp>
       <p:sp>
         <p:nvSpPr>
-          <p:cNvPr id="10" name="S12-cardtext80"/>
+          <p:cNvPr id="10" name="S12-cardtext83"/>
           <p:cNvSpPr txBox="1"/>
           <p:nvPr/>
         </p:nvSpPr>
@@ -3891,7 +3891,7 @@
       </p:sp>
       <p:sp>
         <p:nvSpPr>
-          <p:cNvPr id="11" name="S12-chip81"/>
+          <p:cNvPr id="11" name="S12-chip84"/>
           <p:cNvSpPr txBox="1"/>
           <p:nvPr/>
         </p:nvSpPr>
@@ -3938,7 +3938,7 @@
       </p:sp>
       <p:sp>
         <p:nvSpPr>
-          <p:cNvPr id="12" name="S12-card82"/>
+          <p:cNvPr id="12" name="S12-card85"/>
           <p:cNvSpPr/>
           <p:nvPr/>
         </p:nvSpPr>
@@ -3965,7 +3965,7 @@
       </p:sp>
       <p:sp>
         <p:nvSpPr>
-          <p:cNvPr id="13" name="S12-cardtext83"/>
+          <p:cNvPr id="13" name="S12-cardtext86"/>
           <p:cNvSpPr txBox="1"/>
           <p:nvPr/>
         </p:nvSpPr>
@@ -4007,7 +4007,7 @@
       </p:sp>
       <p:sp>
         <p:nvSpPr>
-          <p:cNvPr id="14" name="S12-chip84"/>
+          <p:cNvPr id="14" name="S12-chip87"/>
           <p:cNvSpPr txBox="1"/>
           <p:nvPr/>
         </p:nvSpPr>
@@ -4054,7 +4054,7 @@
       </p:sp>
       <p:sp>
         <p:nvSpPr>
-          <p:cNvPr id="15" name="S12-card85"/>
+          <p:cNvPr id="15" name="S12-card88"/>
           <p:cNvSpPr/>
           <p:nvPr/>
         </p:nvSpPr>
@@ -4081,7 +4081,7 @@
       </p:sp>
       <p:sp>
         <p:nvSpPr>
-          <p:cNvPr id="16" name="S12-cardtext86"/>
+          <p:cNvPr id="16" name="S12-cardtext89"/>
           <p:cNvSpPr txBox="1"/>
           <p:nvPr/>
         </p:nvSpPr>
@@ -4237,7 +4237,7 @@
       </p:sp>
       <p:sp>
         <p:nvSpPr>
-          <p:cNvPr id="3" name="S13-card87"/>
+          <p:cNvPr id="3" name="S13-card90"/>
           <p:cNvSpPr/>
           <p:nvPr/>
         </p:nvSpPr>
@@ -4264,7 +4264,7 @@
       </p:sp>
       <p:sp>
         <p:nvSpPr>
-          <p:cNvPr id="4" name="S13-cardtext88"/>
+          <p:cNvPr id="4" name="S13-cardtext91"/>
           <p:cNvSpPr txBox="1"/>
           <p:nvPr/>
         </p:nvSpPr>
@@ -4326,7 +4326,7 @@
       </p:sp>
       <p:sp>
         <p:nvSpPr>
-          <p:cNvPr id="5" name="S13-chip89"/>
+          <p:cNvPr id="5" name="S13-chip92"/>
           <p:cNvSpPr txBox="1"/>
           <p:nvPr/>
         </p:nvSpPr>
@@ -4373,7 +4373,7 @@
       </p:sp>
       <p:sp>
         <p:nvSpPr>
-          <p:cNvPr id="6" name="S13-chip90"/>
+          <p:cNvPr id="6" name="S13-chip93"/>
           <p:cNvSpPr txBox="1"/>
           <p:nvPr/>
         </p:nvSpPr>
@@ -4420,7 +4420,7 @@
       </p:sp>
       <p:sp>
         <p:nvSpPr>
-          <p:cNvPr id="7" name="S13-text91"/>
+          <p:cNvPr id="7" name="S13-text94"/>
           <p:cNvSpPr txBox="1"/>
           <p:nvPr/>
         </p:nvSpPr>
@@ -4459,7 +4459,7 @@
       </p:sp>
       <p:sp>
         <p:nvSpPr>
-          <p:cNvPr id="8" name="S13-text92"/>
+          <p:cNvPr id="8" name="S13-text95"/>
           <p:cNvSpPr txBox="1"/>
           <p:nvPr/>
         </p:nvSpPr>
@@ -4498,7 +4498,7 @@
       </p:sp>
       <p:sp>
         <p:nvSpPr>
-          <p:cNvPr id="9" name="S13-text93"/>
+          <p:cNvPr id="9" name="S13-text96"/>
           <p:cNvSpPr txBox="1"/>
           <p:nvPr/>
         </p:nvSpPr>
@@ -4554,7 +4554,7 @@
       </p:sp>
       <p:sp>
         <p:nvSpPr>
-          <p:cNvPr id="10" name="S13-text94"/>
+          <p:cNvPr id="10" name="S13-text97"/>
           <p:cNvSpPr txBox="1"/>
           <p:nvPr/>
         </p:nvSpPr>
@@ -4610,7 +4610,7 @@
       </p:sp>
       <p:sp>
         <p:nvSpPr>
-          <p:cNvPr id="11" name="S13-text95"/>
+          <p:cNvPr id="11" name="S13-text98"/>
           <p:cNvSpPr txBox="1"/>
           <p:nvPr/>
         </p:nvSpPr>
@@ -4763,7 +4763,7 @@
       </p:sp>
       <p:sp>
         <p:nvSpPr>
-          <p:cNvPr id="3" name="S14-card96"/>
+          <p:cNvPr id="3" name="S14-card99"/>
           <p:cNvSpPr/>
           <p:nvPr/>
         </p:nvSpPr>
@@ -4790,7 +4790,7 @@
       </p:sp>
       <p:sp>
         <p:nvSpPr>
-          <p:cNvPr id="4" name="S14-cardtext97"/>
+          <p:cNvPr id="4" name="S14-cardtext100"/>
           <p:cNvSpPr txBox="1"/>
           <p:nvPr/>
         </p:nvSpPr>
@@ -4832,7 +4832,7 @@
       </p:sp>
       <p:sp>
         <p:nvSpPr>
-          <p:cNvPr id="5" name="S14-word98"/>
+          <p:cNvPr id="5" name="S14-word101"/>
           <p:cNvSpPr txBox="1"/>
           <p:nvPr/>
         </p:nvSpPr>
@@ -4896,7 +4896,7 @@
       </p:sp>
       <p:sp>
         <p:nvSpPr>
-          <p:cNvPr id="6" name="S14-word99"/>
+          <p:cNvPr id="6" name="S14-word102"/>
           <p:cNvSpPr txBox="1"/>
           <p:nvPr/>
         </p:nvSpPr>
@@ -4960,7 +4960,7 @@
       </p:sp>
       <p:sp>
         <p:nvSpPr>
-          <p:cNvPr id="7" name="S14-word100"/>
+          <p:cNvPr id="7" name="S14-word103"/>
           <p:cNvSpPr txBox="1"/>
           <p:nvPr/>
         </p:nvSpPr>
@@ -5024,7 +5024,7 @@
       </p:sp>
       <p:sp>
         <p:nvSpPr>
-          <p:cNvPr id="8" name="S14-word101"/>
+          <p:cNvPr id="8" name="S14-word104"/>
           <p:cNvSpPr txBox="1"/>
           <p:nvPr/>
         </p:nvSpPr>
@@ -5511,7 +5511,7 @@
               <a:buNone/>
             </a:pPr>
             <a:r>
-              <a:rPr lang="en-US" altLang="ko-KR" sz="4000" b="1" dirty="0">
+              <a:rPr lang="ko-KR" altLang="en-US" sz="4000" b="1" dirty="0">
                 <a:solidFill>
                   <a:srgbClr val="1F2937"/>
                 </a:solidFill>
@@ -5519,7 +5519,7 @@
                 <a:ea typeface="맑은 고딕" pitchFamily="34" charset="-122"/>
                 <a:cs typeface="맑은 고딕" pitchFamily="34" charset="-120"/>
               </a:rPr>
-              <a:t>I think ~.</a:t>
+              <a:t>I think로 의견 말하기</a:t>
             </a:r>
             <a:endParaRPr lang="ko-KR" sz="4000" dirty="0"/>
           </a:p>
@@ -6697,20 +6697,20 @@
         </p:nvSpPr>
         <p:spPr>
           <a:xfrm>
-            <a:off x="548640" y="5021072"/>
-            <a:ext cx="11091672" cy="1196848"/>
+            <a:off x="6277356" y="2011680"/>
+            <a:ext cx="5362956" cy="4206240"/>
           </a:xfrm>
           <a:prstGeom prst="roundRect">
             <a:avLst>
-              <a:gd name="adj" fmla="val 9168"/>
+              <a:gd name="adj" fmla="val 2609"/>
             </a:avLst>
           </a:prstGeom>
           <a:solidFill>
-            <a:srgbClr val="E6ECF4"/>
+            <a:srgbClr val="EAF3F1"/>
           </a:solidFill>
           <a:ln w="12700">
             <a:solidFill>
-              <a:srgbClr val="E6ECF4"/>
+              <a:srgbClr val="EAF3F1"/>
             </a:solidFill>
             <a:prstDash val="solid"/>
           </a:ln>
@@ -6724,8 +6724,8 @@
         </p:nvSpPr>
         <p:spPr>
           <a:xfrm>
-            <a:off x="822960" y="5158232"/>
-            <a:ext cx="10543032" cy="922528"/>
+            <a:off x="6551676" y="2148840"/>
+            <a:ext cx="4814316" cy="3931920"/>
           </a:xfrm>
           <a:prstGeom prst="rect">
             <a:avLst/>
@@ -6734,7 +6734,7 @@
           <a:ln/>
         </p:spPr>
         <p:txBody>
-          <a:bodyPr wrap="square" lIns="0" tIns="0" rIns="0" bIns="0" rtlCol="0" anchor="ctr"/>
+          <a:bodyPr wrap="square" lIns="0" tIns="0" rIns="0" bIns="0" rtlCol="0" anchor="t"/>
           <a:lstStyle/>
           <a:p>
             <a:pPr eaLnBrk="0" indent="0" marL="0">
@@ -6744,7 +6744,7 @@
               <a:buNone/>
             </a:pPr>
             <a:r>
-              <a:rPr lang="ko-KR" altLang="en-US" sz="2800" dirty="0">
+              <a:rPr lang="ko-KR" altLang="en-US" sz="2800" b="1" dirty="0">
                 <a:solidFill>
                   <a:srgbClr val="1F2937"/>
                 </a:solidFill>
@@ -6752,7 +6752,7 @@
                 <a:ea typeface="맑은 고딕" pitchFamily="34" charset="-122"/>
                 <a:cs typeface="맑은 고딕" pitchFamily="34" charset="-120"/>
               </a:rPr>
-              <a:t>보기:　they are soft.　·　I can play soccer.　·　I can learn new things.</a:t>
+              <a:t>보기</a:t>
             </a:r>
             <a:endParaRPr lang="ko-KR" sz="2800" dirty="0"/>
           </a:p>
@@ -6760,13 +6760,154 @@
       </p:sp>
       <p:sp>
         <p:nvSpPr>
-          <p:cNvPr id="6" name="S06-chip31"/>
+          <p:cNvPr id="6" name="S06-word31"/>
           <p:cNvSpPr txBox="1"/>
           <p:nvPr/>
         </p:nvSpPr>
         <p:spPr>
           <a:xfrm>
-            <a:off x="548640" y="2130721"/>
+            <a:off x="6551676" y="2697480"/>
+            <a:ext cx="4814316" cy="929640"/>
+          </a:xfrm>
+          <a:prstGeom prst="roundRect">
+            <a:avLst>
+              <a:gd name="adj" fmla="val 13770"/>
+            </a:avLst>
+          </a:prstGeom>
+          <a:solidFill>
+            <a:srgbClr val="EAF3F1"/>
+          </a:solidFill>
+          <a:ln>
+            <a:solidFill>
+              <a:srgbClr val="EAF3F1"/>
+            </a:solidFill>
+          </a:ln>
+        </p:spPr>
+        <p:txBody>
+          <a:bodyPr wrap="square" lIns="76200" tIns="50800" rIns="76200" bIns="50800" rtlCol="0" anchor="ctr"/>
+          <a:lstStyle/>
+          <a:p>
+            <a:pPr eaLnBrk="0" algn="ctr" indent="0" marL="0">
+              <a:buNone/>
+            </a:pPr>
+            <a:r>
+              <a:rPr lang="en-US" altLang="ko-KR" sz="3200" b="1" dirty="0">
+                <a:solidFill>
+                  <a:srgbClr val="1F2937"/>
+                </a:solidFill>
+                <a:latin typeface="맑은 고딕" pitchFamily="34" charset="0"/>
+                <a:ea typeface="맑은 고딕" pitchFamily="34" charset="-122"/>
+                <a:cs typeface="맑은 고딕" pitchFamily="34" charset="-120"/>
+              </a:rPr>
+              <a:t>they are soft.</a:t>
+            </a:r>
+            <a:endParaRPr lang="ko-KR" sz="3200" dirty="0"/>
+          </a:p>
+        </p:txBody>
+      </p:sp>
+      <p:sp>
+        <p:nvSpPr>
+          <p:cNvPr id="7" name="S06-word32"/>
+          <p:cNvSpPr txBox="1"/>
+          <p:nvPr/>
+        </p:nvSpPr>
+        <p:spPr>
+          <a:xfrm>
+            <a:off x="6551676" y="3901440"/>
+            <a:ext cx="4814316" cy="929640"/>
+          </a:xfrm>
+          <a:prstGeom prst="roundRect">
+            <a:avLst>
+              <a:gd name="adj" fmla="val 13770"/>
+            </a:avLst>
+          </a:prstGeom>
+          <a:solidFill>
+            <a:srgbClr val="EAF3F1"/>
+          </a:solidFill>
+          <a:ln>
+            <a:solidFill>
+              <a:srgbClr val="EAF3F1"/>
+            </a:solidFill>
+          </a:ln>
+        </p:spPr>
+        <p:txBody>
+          <a:bodyPr wrap="square" lIns="76200" tIns="50800" rIns="76200" bIns="50800" rtlCol="0" anchor="ctr"/>
+          <a:lstStyle/>
+          <a:p>
+            <a:pPr eaLnBrk="0" algn="ctr" indent="0" marL="0">
+              <a:buNone/>
+            </a:pPr>
+            <a:r>
+              <a:rPr lang="en-US" altLang="ko-KR" sz="3200" b="1" dirty="0">
+                <a:solidFill>
+                  <a:srgbClr val="1F2937"/>
+                </a:solidFill>
+                <a:latin typeface="맑은 고딕" pitchFamily="34" charset="0"/>
+                <a:ea typeface="맑은 고딕" pitchFamily="34" charset="-122"/>
+                <a:cs typeface="맑은 고딕" pitchFamily="34" charset="-120"/>
+              </a:rPr>
+              <a:t>I can play soccer.</a:t>
+            </a:r>
+            <a:endParaRPr lang="ko-KR" sz="3200" dirty="0"/>
+          </a:p>
+        </p:txBody>
+      </p:sp>
+      <p:sp>
+        <p:nvSpPr>
+          <p:cNvPr id="8" name="S06-word33"/>
+          <p:cNvSpPr txBox="1"/>
+          <p:nvPr/>
+        </p:nvSpPr>
+        <p:spPr>
+          <a:xfrm>
+            <a:off x="6551676" y="5105400"/>
+            <a:ext cx="4814316" cy="929640"/>
+          </a:xfrm>
+          <a:prstGeom prst="roundRect">
+            <a:avLst>
+              <a:gd name="adj" fmla="val 13770"/>
+            </a:avLst>
+          </a:prstGeom>
+          <a:solidFill>
+            <a:srgbClr val="EAF3F1"/>
+          </a:solidFill>
+          <a:ln>
+            <a:solidFill>
+              <a:srgbClr val="EAF3F1"/>
+            </a:solidFill>
+          </a:ln>
+        </p:spPr>
+        <p:txBody>
+          <a:bodyPr wrap="square" lIns="76200" tIns="50800" rIns="76200" bIns="50800" rtlCol="0" anchor="ctr"/>
+          <a:lstStyle/>
+          <a:p>
+            <a:pPr eaLnBrk="0" algn="ctr" indent="0" marL="0">
+              <a:buNone/>
+            </a:pPr>
+            <a:r>
+              <a:rPr lang="en-US" altLang="ko-KR" sz="2800" b="1" dirty="0">
+                <a:solidFill>
+                  <a:srgbClr val="1F2937"/>
+                </a:solidFill>
+                <a:latin typeface="맑은 고딕" pitchFamily="34" charset="0"/>
+                <a:ea typeface="맑은 고딕" pitchFamily="34" charset="-122"/>
+                <a:cs typeface="맑은 고딕" pitchFamily="34" charset="-120"/>
+              </a:rPr>
+              <a:t>I can learn new things.</a:t>
+            </a:r>
+            <a:endParaRPr lang="ko-KR" sz="2800" dirty="0"/>
+          </a:p>
+        </p:txBody>
+      </p:sp>
+      <p:sp>
+        <p:nvSpPr>
+          <p:cNvPr id="9" name="S06-chip34"/>
+          <p:cNvSpPr txBox="1"/>
+          <p:nvPr/>
+        </p:nvSpPr>
+        <p:spPr>
+          <a:xfrm>
+            <a:off x="548640" y="2368296"/>
             <a:ext cx="566928" cy="566928"/>
           </a:xfrm>
           <a:prstGeom prst="roundRect">
@@ -6807,14 +6948,14 @@
       </p:sp>
       <p:sp>
         <p:nvSpPr>
-          <p:cNvPr id="7" name="S06-text32"/>
+          <p:cNvPr id="10" name="S06-text35"/>
           <p:cNvSpPr txBox="1"/>
           <p:nvPr/>
         </p:nvSpPr>
         <p:spPr>
           <a:xfrm>
             <a:off x="1344168" y="2011680"/>
-            <a:ext cx="10296144" cy="805011"/>
+            <a:ext cx="4567428" cy="1280160"/>
           </a:xfrm>
           <a:prstGeom prst="rect">
             <a:avLst/>
@@ -6846,13 +6987,13 @@
       </p:sp>
       <p:sp>
         <p:nvSpPr>
-          <p:cNvPr id="8" name="S06-chip33"/>
+          <p:cNvPr id="11" name="S06-chip36"/>
           <p:cNvSpPr txBox="1"/>
           <p:nvPr/>
         </p:nvSpPr>
         <p:spPr>
           <a:xfrm>
-            <a:off x="548640" y="3118612"/>
+            <a:off x="548640" y="3831336"/>
             <a:ext cx="566928" cy="566928"/>
           </a:xfrm>
           <a:prstGeom prst="roundRect">
@@ -6893,14 +7034,14 @@
       </p:sp>
       <p:sp>
         <p:nvSpPr>
-          <p:cNvPr id="9" name="S06-text34"/>
+          <p:cNvPr id="12" name="S06-text37"/>
           <p:cNvSpPr txBox="1"/>
           <p:nvPr/>
         </p:nvSpPr>
         <p:spPr>
           <a:xfrm>
-            <a:off x="1344168" y="2999571"/>
-            <a:ext cx="10296144" cy="805011"/>
+            <a:off x="1344168" y="3474720"/>
+            <a:ext cx="4567428" cy="1280160"/>
           </a:xfrm>
           <a:prstGeom prst="rect">
             <a:avLst/>
@@ -6932,13 +7073,13 @@
       </p:sp>
       <p:sp>
         <p:nvSpPr>
-          <p:cNvPr id="10" name="S06-chip35"/>
+          <p:cNvPr id="13" name="S06-chip38"/>
           <p:cNvSpPr txBox="1"/>
           <p:nvPr/>
         </p:nvSpPr>
         <p:spPr>
           <a:xfrm>
-            <a:off x="548640" y="4106503"/>
+            <a:off x="548640" y="5294376"/>
             <a:ext cx="566928" cy="566928"/>
           </a:xfrm>
           <a:prstGeom prst="roundRect">
@@ -6979,14 +7120,14 @@
       </p:sp>
       <p:sp>
         <p:nvSpPr>
-          <p:cNvPr id="11" name="S06-text36"/>
+          <p:cNvPr id="14" name="S06-text39"/>
           <p:cNvSpPr txBox="1"/>
           <p:nvPr/>
         </p:nvSpPr>
         <p:spPr>
           <a:xfrm>
-            <a:off x="1344168" y="3987461"/>
-            <a:ext cx="10296144" cy="805011"/>
+            <a:off x="1344168" y="4937760"/>
+            <a:ext cx="4567428" cy="1280160"/>
           </a:xfrm>
           <a:prstGeom prst="rect">
             <a:avLst/>
@@ -7132,7 +7273,7 @@
       </p:sp>
       <p:sp>
         <p:nvSpPr>
-          <p:cNvPr id="3" name="S07-card37"/>
+          <p:cNvPr id="3" name="S07-card40"/>
           <p:cNvSpPr/>
           <p:nvPr/>
         </p:nvSpPr>
@@ -7159,7 +7300,7 @@
       </p:sp>
       <p:sp>
         <p:nvSpPr>
-          <p:cNvPr id="4" name="S07-cardtext38"/>
+          <p:cNvPr id="4" name="S07-cardtext41"/>
           <p:cNvSpPr txBox="1"/>
           <p:nvPr/>
         </p:nvSpPr>
@@ -7201,7 +7342,7 @@
       </p:sp>
       <p:sp>
         <p:nvSpPr>
-          <p:cNvPr id="5" name="S07-card39"/>
+          <p:cNvPr id="5" name="S07-card42"/>
           <p:cNvSpPr/>
           <p:nvPr/>
         </p:nvSpPr>
@@ -7228,7 +7369,7 @@
       </p:sp>
       <p:sp>
         <p:nvSpPr>
-          <p:cNvPr id="6" name="S07-cardtext40"/>
+          <p:cNvPr id="6" name="S07-cardtext43"/>
           <p:cNvSpPr txBox="1"/>
           <p:nvPr/>
         </p:nvSpPr>
@@ -7270,7 +7411,7 @@
       </p:sp>
       <p:sp>
         <p:nvSpPr>
-          <p:cNvPr id="7" name="S07-chip41"/>
+          <p:cNvPr id="7" name="S07-chip44"/>
           <p:cNvSpPr txBox="1"/>
           <p:nvPr/>
         </p:nvSpPr>
@@ -7317,7 +7458,7 @@
       </p:sp>
       <p:sp>
         <p:nvSpPr>
-          <p:cNvPr id="8" name="S07-word42"/>
+          <p:cNvPr id="8" name="S07-word45"/>
           <p:cNvSpPr txBox="1"/>
           <p:nvPr/>
         </p:nvSpPr>
@@ -7364,7 +7505,7 @@
       </p:sp>
       <p:sp>
         <p:nvSpPr>
-          <p:cNvPr id="9" name="S07-chip43"/>
+          <p:cNvPr id="9" name="S07-chip46"/>
           <p:cNvSpPr txBox="1"/>
           <p:nvPr/>
         </p:nvSpPr>
@@ -7411,7 +7552,7 @@
       </p:sp>
       <p:sp>
         <p:nvSpPr>
-          <p:cNvPr id="10" name="S07-word44"/>
+          <p:cNvPr id="10" name="S07-word47"/>
           <p:cNvSpPr txBox="1"/>
           <p:nvPr/>
         </p:nvSpPr>
@@ -7572,7 +7713,7 @@
       </p:sp>
       <p:sp>
         <p:nvSpPr>
-          <p:cNvPr id="3" name="S08-text45"/>
+          <p:cNvPr id="3" name="S08-text48"/>
           <p:cNvSpPr txBox="1"/>
           <p:nvPr/>
         </p:nvSpPr>
@@ -7611,7 +7752,7 @@
       </p:sp>
       <p:sp>
         <p:nvSpPr>
-          <p:cNvPr id="4" name="S08-card46"/>
+          <p:cNvPr id="4" name="S08-card49"/>
           <p:cNvSpPr/>
           <p:nvPr/>
         </p:nvSpPr>
@@ -7638,7 +7779,7 @@
       </p:sp>
       <p:sp>
         <p:nvSpPr>
-          <p:cNvPr id="5" name="S08-cardtext47"/>
+          <p:cNvPr id="5" name="S08-cardtext50"/>
           <p:cNvSpPr txBox="1"/>
           <p:nvPr/>
         </p:nvSpPr>
@@ -7700,7 +7841,7 @@
       </p:sp>
       <p:sp>
         <p:nvSpPr>
-          <p:cNvPr id="6" name="S08-chip48"/>
+          <p:cNvPr id="6" name="S08-chip51"/>
           <p:cNvSpPr txBox="1"/>
           <p:nvPr/>
         </p:nvSpPr>
@@ -7747,7 +7888,7 @@
       </p:sp>
       <p:sp>
         <p:nvSpPr>
-          <p:cNvPr id="7" name="S08-text49"/>
+          <p:cNvPr id="7" name="S08-text52"/>
           <p:cNvSpPr txBox="1"/>
           <p:nvPr/>
         </p:nvSpPr>
@@ -7786,7 +7927,7 @@
       </p:sp>
       <p:sp>
         <p:nvSpPr>
-          <p:cNvPr id="8" name="S08-chip50"/>
+          <p:cNvPr id="8" name="S08-chip53"/>
           <p:cNvSpPr txBox="1"/>
           <p:nvPr/>
         </p:nvSpPr>
@@ -7833,7 +7974,7 @@
       </p:sp>
       <p:sp>
         <p:nvSpPr>
-          <p:cNvPr id="9" name="S08-text51"/>
+          <p:cNvPr id="9" name="S08-text54"/>
           <p:cNvSpPr txBox="1"/>
           <p:nvPr/>
         </p:nvSpPr>
@@ -7872,7 +8013,7 @@
       </p:sp>
       <p:sp>
         <p:nvSpPr>
-          <p:cNvPr id="10" name="S08-chip52"/>
+          <p:cNvPr id="10" name="S08-chip55"/>
           <p:cNvSpPr txBox="1"/>
           <p:nvPr/>
         </p:nvSpPr>
@@ -7919,7 +8060,7 @@
       </p:sp>
       <p:sp>
         <p:nvSpPr>
-          <p:cNvPr id="11" name="S08-text53"/>
+          <p:cNvPr id="11" name="S08-text56"/>
           <p:cNvSpPr txBox="1"/>
           <p:nvPr/>
         </p:nvSpPr>
@@ -8072,7 +8213,7 @@
       </p:sp>
       <p:sp>
         <p:nvSpPr>
-          <p:cNvPr id="3" name="S09-card54"/>
+          <p:cNvPr id="3" name="S09-card57"/>
           <p:cNvSpPr/>
           <p:nvPr/>
         </p:nvSpPr>
@@ -8099,7 +8240,7 @@
       </p:sp>
       <p:sp>
         <p:nvSpPr>
-          <p:cNvPr id="4" name="S09-cardtext55"/>
+          <p:cNvPr id="4" name="S09-cardtext58"/>
           <p:cNvSpPr txBox="1"/>
           <p:nvPr/>
         </p:nvSpPr>
@@ -8221,7 +8362,7 @@
       </p:sp>
       <p:sp>
         <p:nvSpPr>
-          <p:cNvPr id="5" name="S09-stepno56"/>
+          <p:cNvPr id="5" name="S09-stepno59"/>
           <p:cNvSpPr txBox="1"/>
           <p:nvPr/>
         </p:nvSpPr>
@@ -8266,7 +8407,7 @@
       </p:sp>
       <p:sp>
         <p:nvSpPr>
-          <p:cNvPr id="6" name="S09-text57"/>
+          <p:cNvPr id="6" name="S09-text60"/>
           <p:cNvSpPr txBox="1"/>
           <p:nvPr/>
         </p:nvSpPr>
@@ -8305,7 +8446,7 @@
       </p:sp>
       <p:sp>
         <p:nvSpPr>
-          <p:cNvPr id="7" name="S09-stepno58"/>
+          <p:cNvPr id="7" name="S09-stepno61"/>
           <p:cNvSpPr txBox="1"/>
           <p:nvPr/>
         </p:nvSpPr>
@@ -8350,7 +8491,7 @@
       </p:sp>
       <p:sp>
         <p:nvSpPr>
-          <p:cNvPr id="8" name="S09-text59"/>
+          <p:cNvPr id="8" name="S09-text62"/>
           <p:cNvSpPr txBox="1"/>
           <p:nvPr/>
         </p:nvSpPr>
@@ -8389,7 +8530,7 @@
       </p:sp>
       <p:sp>
         <p:nvSpPr>
-          <p:cNvPr id="9" name="S09-stepno60"/>
+          <p:cNvPr id="9" name="S09-stepno63"/>
           <p:cNvSpPr txBox="1"/>
           <p:nvPr/>
         </p:nvSpPr>
@@ -8434,7 +8575,7 @@
       </p:sp>
       <p:sp>
         <p:nvSpPr>
-          <p:cNvPr id="10" name="S09-text61"/>
+          <p:cNvPr id="10" name="S09-text64"/>
           <p:cNvSpPr txBox="1"/>
           <p:nvPr/>
         </p:nvSpPr>
@@ -8473,7 +8614,7 @@
       </p:sp>
       <p:sp>
         <p:nvSpPr>
-          <p:cNvPr id="11" name="S09-stepno62"/>
+          <p:cNvPr id="11" name="S09-stepno65"/>
           <p:cNvSpPr txBox="1"/>
           <p:nvPr/>
         </p:nvSpPr>
@@ -8518,7 +8659,7 @@
       </p:sp>
       <p:sp>
         <p:nvSpPr>
-          <p:cNvPr id="12" name="S09-text63"/>
+          <p:cNvPr id="12" name="S09-text66"/>
           <p:cNvSpPr txBox="1"/>
           <p:nvPr/>
         </p:nvSpPr>

--- a/dist/초6/영어/말하기와쓰기/초6_영어_말하기와쓰기_03_의견말하기_학생용.pptx
+++ b/dist/초6/영어/말하기와쓰기/초6_영어_말하기와쓰기_03_의견말하기_학생용.pptx
@@ -119,20 +119,20 @@
   <p:extLst>
     <p:ext uri="{521415D9-36F7-43E2-AB2F-B90AF26B5E84}">
       <p14:sectionLst xmlns:p14="http://schemas.microsoft.com/office/powerpoint/2010/main">
-        <p14:section name="도입" id="{d2a8891e-2002-7aa3-6cbc-48bce3cb2ca5}">
+        <p14:section name="도입" id="{b58d2732-cf71-9659-db63-9833ecfe1008}">
           <p14:sldIdLst>
             <p14:sldId id="256"/>
             <p14:sldId id="257"/>
           </p14:sldIdLst>
         </p14:section>
-        <p14:section name="개념" id="{918466d7-c2f0-a014-e728-bdc9d2136dc1}">
+        <p14:section name="개념" id="{ad8e0db2-faae-3227-3924-5eb22858aaa0}">
           <p14:sldIdLst>
             <p14:sldId id="258"/>
             <p14:sldId id="259"/>
             <p14:sldId id="260"/>
           </p14:sldIdLst>
         </p14:section>
-        <p14:section name="연습" id="{d20b9497-d5e8-aed3-097f-5df7898a58eb}">
+        <p14:section name="연습" id="{f06f9c78-9a14-0406-edb3-b089db421fdd}">
           <p14:sldIdLst>
             <p14:sldId id="261"/>
             <p14:sldId id="262"/>
@@ -140,18 +140,18 @@
             <p14:sldId id="264"/>
           </p14:sldIdLst>
         </p14:section>
-        <p14:section name="확인" id="{bbeb16f4-edd4-4ddb-b02c-7cc068e7bb8c}">
+        <p14:section name="확인" id="{a2f9cf3b-c210-8250-cab5-0ef85dfa4bd9}">
           <p14:sldIdLst>
             <p14:sldId id="265"/>
             <p14:sldId id="266"/>
           </p14:sldIdLst>
         </p14:section>
-        <p14:section name="정리" id="{1bd593af-6a5a-9f16-0048-88b339bb4f3a}">
+        <p14:section name="정리" id="{61bc0a9e-5817-26df-1c3b-1dd75902a319}">
           <p14:sldIdLst>
             <p14:sldId id="267"/>
           </p14:sldIdLst>
         </p14:section>
-        <p14:section name="보충" id="{0851d338-0723-d6a3-81b7-cb8253b66872}">
+        <p14:section name="보충" id="{a89718c7-63bb-47ef-fc34-6032dc85ff49}">
           <p14:sldIdLst>
             <p14:sldId id="268"/>
           </p14:sldIdLst>
@@ -6979,7 +6979,7 @@
                 <a:ea typeface="맑은 고딕" pitchFamily="34" charset="-122"/>
                 <a:cs typeface="맑은 고딕" pitchFamily="34" charset="-120"/>
               </a:rPr>
-              <a:t>I think cats are cute because ______.</a:t>
+              <a:t>I think cats are cute because ______.</a:t>
             </a:r>
             <a:endParaRPr lang="ko-KR" sz="2800" dirty="0"/>
           </a:p>
@@ -7065,7 +7065,7 @@
                 <a:ea typeface="맑은 고딕" pitchFamily="34" charset="-122"/>
                 <a:cs typeface="맑은 고딕" pitchFamily="34" charset="-120"/>
               </a:rPr>
-              <a:t>I think P.E. is fun because ______.</a:t>
+              <a:t>I think P.E. is fun because ______.</a:t>
             </a:r>
             <a:endParaRPr lang="ko-KR" sz="2800" dirty="0"/>
           </a:p>
@@ -7151,7 +7151,7 @@
                 <a:ea typeface="맑은 고딕" pitchFamily="34" charset="-122"/>
                 <a:cs typeface="맑은 고딕" pitchFamily="34" charset="-120"/>
               </a:rPr>
-              <a:t>I think books are great because ______.</a:t>
+              <a:t>I think books are great because ______.</a:t>
             </a:r>
             <a:endParaRPr lang="ko-KR" sz="2800" dirty="0"/>
           </a:p>

--- a/dist/초6/영어/말하기와쓰기/초6_영어_말하기와쓰기_03_의견말하기_학생용.pptx
+++ b/dist/초6/영어/말하기와쓰기/초6_영어_말하기와쓰기_03_의견말하기_학생용.pptx
@@ -119,20 +119,20 @@
   <p:extLst>
     <p:ext uri="{521415D9-36F7-43E2-AB2F-B90AF26B5E84}">
       <p14:sectionLst xmlns:p14="http://schemas.microsoft.com/office/powerpoint/2010/main">
-        <p14:section name="도입" id="{b58d2732-cf71-9659-db63-9833ecfe1008}">
+        <p14:section name="도입" id="{070d73bc-20e5-b011-a1e9-81ea7f316342}">
           <p14:sldIdLst>
             <p14:sldId id="256"/>
             <p14:sldId id="257"/>
           </p14:sldIdLst>
         </p14:section>
-        <p14:section name="개념" id="{ad8e0db2-faae-3227-3924-5eb22858aaa0}">
+        <p14:section name="개념" id="{0591c401-c780-a25e-760d-3ff83d60fb14}">
           <p14:sldIdLst>
             <p14:sldId id="258"/>
             <p14:sldId id="259"/>
             <p14:sldId id="260"/>
           </p14:sldIdLst>
         </p14:section>
-        <p14:section name="연습" id="{f06f9c78-9a14-0406-edb3-b089db421fdd}">
+        <p14:section name="연습" id="{4ae3d75e-7c32-bd8a-34eb-8716b0d6edce}">
           <p14:sldIdLst>
             <p14:sldId id="261"/>
             <p14:sldId id="262"/>
@@ -140,18 +140,18 @@
             <p14:sldId id="264"/>
           </p14:sldIdLst>
         </p14:section>
-        <p14:section name="확인" id="{a2f9cf3b-c210-8250-cab5-0ef85dfa4bd9}">
+        <p14:section name="확인" id="{5ed8ef76-6527-4348-2050-fd96576d5564}">
           <p14:sldIdLst>
             <p14:sldId id="265"/>
             <p14:sldId id="266"/>
           </p14:sldIdLst>
         </p14:section>
-        <p14:section name="정리" id="{61bc0a9e-5817-26df-1c3b-1dd75902a319}">
+        <p14:section name="정리" id="{20609fa5-80c1-a3b4-d35c-526f779f7f46}">
           <p14:sldIdLst>
             <p14:sldId id="267"/>
           </p14:sldIdLst>
         </p14:section>
-        <p14:section name="보충" id="{a89718c7-63bb-47ef-fc34-6032dc85ff49}">
+        <p14:section name="보충" id="{bad4122c-8e78-8f7b-e02a-67ef010c38ee}">
           <p14:sldIdLst>
             <p14:sldId id="268"/>
           </p14:sldIdLst>

--- a/dist/초6/영어/말하기와쓰기/초6_영어_말하기와쓰기_03_의견말하기_학생용.pptx
+++ b/dist/초6/영어/말하기와쓰기/초6_영어_말하기와쓰기_03_의견말하기_학생용.pptx
@@ -119,20 +119,20 @@
   <p:extLst>
     <p:ext uri="{521415D9-36F7-43E2-AB2F-B90AF26B5E84}">
       <p14:sectionLst xmlns:p14="http://schemas.microsoft.com/office/powerpoint/2010/main">
-        <p14:section name="도입" id="{070d73bc-20e5-b011-a1e9-81ea7f316342}">
+        <p14:section name="도입" id="{5b915726-cbfc-f8fb-6c39-aad290198200}">
           <p14:sldIdLst>
             <p14:sldId id="256"/>
             <p14:sldId id="257"/>
           </p14:sldIdLst>
         </p14:section>
-        <p14:section name="개념" id="{0591c401-c780-a25e-760d-3ff83d60fb14}">
+        <p14:section name="개념" id="{3e4fa564-bb66-37ff-0be6-baed40edc67e}">
           <p14:sldIdLst>
             <p14:sldId id="258"/>
             <p14:sldId id="259"/>
             <p14:sldId id="260"/>
           </p14:sldIdLst>
         </p14:section>
-        <p14:section name="연습" id="{4ae3d75e-7c32-bd8a-34eb-8716b0d6edce}">
+        <p14:section name="연습" id="{0c217a69-d33e-01f1-a488-27cdb042474d}">
           <p14:sldIdLst>
             <p14:sldId id="261"/>
             <p14:sldId id="262"/>
@@ -140,18 +140,18 @@
             <p14:sldId id="264"/>
           </p14:sldIdLst>
         </p14:section>
-        <p14:section name="확인" id="{5ed8ef76-6527-4348-2050-fd96576d5564}">
+        <p14:section name="확인" id="{f01cb8d2-3db3-4092-9e0d-ebd367dd4862}">
           <p14:sldIdLst>
             <p14:sldId id="265"/>
             <p14:sldId id="266"/>
           </p14:sldIdLst>
         </p14:section>
-        <p14:section name="정리" id="{20609fa5-80c1-a3b4-d35c-526f779f7f46}">
+        <p14:section name="정리" id="{978ae67a-148a-c44e-28f7-71c115a9493b}">
           <p14:sldIdLst>
             <p14:sldId id="267"/>
           </p14:sldIdLst>
         </p14:section>
-        <p14:section name="보충" id="{bad4122c-8e78-8f7b-e02a-67ef010c38ee}">
+        <p14:section name="보충" id="{7f4d62aa-b495-6e63-68ee-d3e9e507c17f}">
           <p14:sldIdLst>
             <p14:sldId id="268"/>
           </p14:sldIdLst>
